--- a/docs/final_report/cs610_final_report_presentation.pptx
+++ b/docs/final_report/cs610_final_report_presentation.pptx
@@ -121,6 +121,15 @@
     </p:ext>
   </p:extLst>
 </p:presentation>
+</file>
+
+<file path=ppt/revisionInfo.xml><?xml version="1.0" encoding="utf-8"?>
+<p1510:revInfo xmlns:a="http://schemas.openxmlformats.org/drawingml/2006/main" xmlns:r="http://schemas.openxmlformats.org/officeDocument/2006/relationships" xmlns:p1510="http://schemas.microsoft.com/office/powerpoint/2015/10/main">
+  <p1510:revLst>
+    <p1510:client id="{338A3723-C774-96C3-F02A-AADCAE282D9D}" v="22" dt="2026-06-04T18:44:28.505"/>
+    <p1510:client id="{6DB86085-EDE5-1AAA-3215-0A2A46B554C7}" v="5" dt="2026-06-04T04:14:10.511"/>
+  </p1510:revLst>
+</p1510:revInfo>
 </file>
 
 <file path=ppt/notesMasters/notesMaster1.xml><?xml version="1.0" encoding="utf-8"?>
@@ -4306,12 +4315,9 @@
           <a:ln/>
         </p:spPr>
         <p:txBody>
-          <a:bodyPr wrap="square" rtlCol="0" anchor="ctr"/>
-          <a:lstStyle/>
-          <a:p>
-            <a:pPr marL="0" indent="0" algn="l">
-              <a:buNone/>
-            </a:pPr>
+          <a:bodyPr wrap="square" lIns="91440" tIns="45720" rIns="91440" bIns="45720" rtlCol="0" anchor="ctr"/>
+          <a:lstStyle/>
+          <a:p>
             <a:r>
               <a:rPr lang="en-US" sz="2600" b="1">
                 <a:solidFill>
@@ -5310,7 +5316,7 @@
         <p:spPr>
           <a:xfrm>
             <a:off x="6096000" y="1130300"/>
-            <a:ext cx="2755900" cy="2387600"/>
+            <a:ext cx="2766483" cy="3049058"/>
           </a:xfrm>
           <a:prstGeom prst="rect">
             <a:avLst/>
@@ -5366,7 +5372,7 @@
         <p:spPr>
           <a:xfrm>
             <a:off x="3175000" y="1130300"/>
-            <a:ext cx="2755900" cy="2387600"/>
+            <a:ext cx="2755900" cy="3054350"/>
           </a:xfrm>
           <a:prstGeom prst="rect">
             <a:avLst/>
@@ -5421,8 +5427,8 @@
         </p:nvSpPr>
         <p:spPr>
           <a:xfrm>
-            <a:off x="254000" y="1130300"/>
-            <a:ext cx="2755900" cy="2387600"/>
+            <a:off x="259291" y="1130300"/>
+            <a:ext cx="2745318" cy="3049058"/>
           </a:xfrm>
           <a:prstGeom prst="rect">
             <a:avLst/>
@@ -5727,8 +5733,8 @@
         </p:nvSpPr>
         <p:spPr>
           <a:xfrm>
-            <a:off x="381000" y="1600200"/>
-            <a:ext cx="2501900" cy="1841500"/>
+            <a:off x="375709" y="1594909"/>
+            <a:ext cx="2507191" cy="2397124"/>
           </a:xfrm>
           <a:prstGeom prst="rect">
             <a:avLst/>
@@ -5739,18 +5745,14 @@
           </a:ln>
         </p:spPr>
         <p:txBody>
-          <a:bodyPr vertOverflow="overflow" vert="horz" wrap="square" rtlCol="0" anchor="t" anchorCtr="0">
+          <a:bodyPr vertOverflow="overflow" vert="horz" wrap="square" lIns="91440" tIns="45720" rIns="91440" bIns="45720" rtlCol="0" anchor="t" anchorCtr="0">
             <a:noAutofit/>
           </a:bodyPr>
           <a:lstStyle/>
           <a:p>
-            <a:pPr algn="l">
-              <a:lnSpc>
-                <a:spcPts val="1900"/>
-              </a:lnSpc>
-            </a:pPr>
-            <a:r>
-              <a:rPr lang="en-US" sz="1500">
+            <a:pPr algn="l"/>
+            <a:r>
+              <a:rPr lang="en-US">
                 <a:solidFill>
                   <a:srgbClr val="404040"/>
                 </a:solidFill>
@@ -5759,6 +5761,14 @@
               </a:rPr>
               <a:t>Constantinou, Fenton &amp; Neil (2012–13): BN for soccer forecasting — game variables only, no market movement.</a:t>
             </a:r>
+            <a:endParaRPr lang="en-US">
+              <a:solidFill>
+                <a:srgbClr val="404040"/>
+              </a:solidFill>
+              <a:latin typeface="Calibri"/>
+              <a:ea typeface="Calibri"/>
+              <a:cs typeface="Calibri"/>
+            </a:endParaRPr>
           </a:p>
         </p:txBody>
       </p:sp>
@@ -5922,18 +5932,14 @@
           </a:ln>
         </p:spPr>
         <p:txBody>
-          <a:bodyPr vertOverflow="overflow" vert="horz" wrap="square" rtlCol="0" anchor="t" anchorCtr="0">
+          <a:bodyPr vertOverflow="overflow" vert="horz" wrap="square" lIns="91440" tIns="45720" rIns="91440" bIns="45720" rtlCol="0" anchor="t" anchorCtr="0">
             <a:noAutofit/>
           </a:bodyPr>
           <a:lstStyle/>
           <a:p>
-            <a:pPr algn="l">
-              <a:lnSpc>
-                <a:spcPts val="1900"/>
-              </a:lnSpc>
-            </a:pPr>
-            <a:r>
-              <a:rPr lang="en-US" sz="1500">
+            <a:pPr algn="l"/>
+            <a:r>
+              <a:rPr lang="en-US">
                 <a:solidFill>
                   <a:srgbClr val="404040"/>
                 </a:solidFill>
@@ -5942,6 +5948,14 @@
               </a:rPr>
               <a:t>Egidi, Pauli &amp; Torelli (2018): hierarchical Bayes blending odds — no conditional dependence structure.</a:t>
             </a:r>
+            <a:endParaRPr lang="en-US">
+              <a:solidFill>
+                <a:srgbClr val="404040"/>
+              </a:solidFill>
+              <a:latin typeface="Calibri"/>
+              <a:ea typeface="Calibri"/>
+              <a:cs typeface="Calibri"/>
+            </a:endParaRPr>
           </a:p>
         </p:txBody>
       </p:sp>
@@ -6105,18 +6119,14 @@
           </a:ln>
         </p:spPr>
         <p:txBody>
-          <a:bodyPr vertOverflow="overflow" vert="horz" wrap="square" rtlCol="0" anchor="t" anchorCtr="0">
+          <a:bodyPr vertOverflow="overflow" vert="horz" wrap="square" lIns="91440" tIns="45720" rIns="91440" bIns="45720" rtlCol="0" anchor="t" anchorCtr="0">
             <a:noAutofit/>
           </a:bodyPr>
           <a:lstStyle/>
           <a:p>
-            <a:pPr algn="l">
-              <a:lnSpc>
-                <a:spcPts val="1900"/>
-              </a:lnSpc>
-            </a:pPr>
-            <a:r>
-              <a:rPr lang="en-US" sz="1500">
+            <a:pPr algn="l"/>
+            <a:r>
+              <a:rPr lang="en-US">
                 <a:solidFill>
                   <a:srgbClr val="404040"/>
                 </a:solidFill>
@@ -6125,6 +6135,14 @@
               </a:rPr>
               <a:t>Simon (2024), Moskowitz (2021): line-movement efficiency — no game-stats integration.</a:t>
             </a:r>
+            <a:endParaRPr lang="en-US">
+              <a:solidFill>
+                <a:srgbClr val="404040"/>
+              </a:solidFill>
+              <a:latin typeface="Calibri"/>
+              <a:ea typeface="Calibri"/>
+              <a:cs typeface="Calibri"/>
+            </a:endParaRPr>
           </a:p>
         </p:txBody>
       </p:sp>
@@ -6142,8 +6160,8 @@
         </p:nvSpPr>
         <p:spPr>
           <a:xfrm>
-            <a:off x="254000" y="3759200"/>
-            <a:ext cx="8636000" cy="1117600"/>
+            <a:off x="269875" y="4293658"/>
+            <a:ext cx="8598959" cy="593725"/>
           </a:xfrm>
           <a:prstGeom prst="rect">
             <a:avLst/>
@@ -6198,8 +6216,8 @@
         </p:nvSpPr>
         <p:spPr>
           <a:xfrm>
-            <a:off x="254000" y="3759200"/>
-            <a:ext cx="50800" cy="1117600"/>
+            <a:off x="264583" y="4288366"/>
+            <a:ext cx="24342" cy="593725"/>
           </a:xfrm>
           <a:prstGeom prst="rect">
             <a:avLst/>
@@ -6252,7 +6270,7 @@
         </p:nvSpPr>
         <p:spPr>
           <a:xfrm>
-            <a:off x="457200" y="3860800"/>
+            <a:off x="457200" y="4421717"/>
             <a:ext cx="2540000" cy="304800"/>
           </a:xfrm>
           <a:prstGeom prst="rect">
@@ -6279,50 +6297,6 @@
                 <a:cs typeface="Calibri"/>
               </a:rPr>
               <a:t>GAP CONFIRMED</a:t>
-            </a:r>
-          </a:p>
-        </p:txBody>
-      </p:sp>
-      <p:sp>
-        <p:nvSpPr>
-          <p:cNvPr id="42" name="TextBox 41">
-            <a:extLst>
-              <a:ext uri="{FF2B5EF4-FFF2-40B4-BE49-F238E27FC236}">
-                <a16:creationId xmlns:a16="http://schemas.microsoft.com/office/drawing/2014/main" id="{5BF94E69-CA15-01B8-A118-ADC80E63E5C6}"/>
-              </a:ext>
-            </a:extLst>
-          </p:cNvPr>
-          <p:cNvSpPr txBox="1"/>
-          <p:nvPr/>
-        </p:nvSpPr>
-        <p:spPr>
-          <a:xfrm>
-            <a:off x="457200" y="4191000"/>
-            <a:ext cx="8305800" cy="304800"/>
-          </a:xfrm>
-          <a:prstGeom prst="rect">
-            <a:avLst/>
-          </a:prstGeom>
-          <a:noFill/>
-          <a:ln>
-            <a:noFill/>
-          </a:ln>
-        </p:spPr>
-        <p:txBody>
-          <a:bodyPr vertOverflow="overflow" vert="horz" wrap="none" rtlCol="0" anchor="t" anchorCtr="0">
-            <a:noAutofit/>
-          </a:bodyPr>
-          <a:lstStyle/>
-          <a:p>
-            <a:r>
-              <a:rPr lang="en-US" sz="1500">
-                <a:solidFill>
-                  <a:srgbClr val="404040"/>
-                </a:solidFill>
-                <a:latin typeface="Calibri"/>
-                <a:cs typeface="Calibri"/>
-              </a:rPr>
-              <a:t>Walsh &amp; Joshi (2024) systematic review of 219 papers confirms no study integrates all three silos.</a:t>
             </a:r>
           </a:p>
         </p:txBody>

--- a/docs/final_report/cs610_final_report_presentation.pptx
+++ b/docs/final_report/cs610_final_report_presentation.pptx
@@ -301,70 +301,7 @@
           <a:bodyPr/>
           <a:lstStyle/>
           <a:p>
-            <a:r>
-              <a:rPr lang="en-US">
-                <a:ea typeface="Calibri"/>
-                <a:cs typeface="Calibri"/>
-              </a:rPr>
-              <a:t>*Leland*</a:t>
-            </a:r>
-            <a:endParaRPr lang="en-US"/>
-          </a:p>
-          <a:p>
-            <a:endParaRPr lang="en-US"/>
-          </a:p>
-          <a:p>
-            <a:r>
-              <a:rPr lang="en-US"/>
-              <a:t>Hi everyone, my name is Leland.</a:t>
-            </a:r>
-          </a:p>
-          <a:p>
-            <a:endParaRPr lang="en-US"/>
-          </a:p>
-          <a:p>
-            <a:r>
-              <a:rPr lang="en-US"/>
-              <a:t>My teammates - Johnny and Ishant - and I are going to present our project on how we plan to implement a Bayesian Network to model NFL Game Stats and Market Signals.</a:t>
-            </a:r>
-          </a:p>
-          <a:p>
-            <a:endParaRPr lang="en-US"/>
-          </a:p>
-          <a:p>
-            <a:r>
-              <a:rPr lang="en-US"/>
-              <a:t>I don’t think any of us are particularly interested in sports, but there are a few good reasons why we chose this project.</a:t>
-            </a:r>
-            <a:endParaRPr lang="en-US">
-              <a:ea typeface="Calibri"/>
-              <a:cs typeface="Calibri"/>
-            </a:endParaRPr>
-          </a:p>
-          <a:p>
-            <a:endParaRPr lang="en-US"/>
-          </a:p>
-          <a:p>
-            <a:r>
-              <a:rPr lang="en-US"/>
-              <a:t>The data is clean, public, and the causal direction is well known — both lend themselves well to a Bayesian Network.</a:t>
-            </a:r>
-            <a:endParaRPr lang="en-US">
-              <a:ea typeface="Calibri"/>
-              <a:cs typeface="+mn-lt"/>
-            </a:endParaRPr>
-          </a:p>
-          <a:p>
-            <a:endParaRPr lang="en-US"/>
-          </a:p>
-          <a:p>
-            <a:r>
-              <a:rPr lang="en-US"/>
-              <a:t>And as much as sports data has been modeled, we believe our project is a truly novel application of a Bayesian Network. </a:t>
-            </a:r>
-          </a:p>
-          <a:p>
-            <a:endParaRPr lang="en-US">
+            <a:endParaRPr lang="en-US" dirty="0">
               <a:ea typeface="Calibri"/>
               <a:cs typeface="Calibri"/>
             </a:endParaRPr>
@@ -408,156 +345,6 @@
 </file>
 
 <file path=ppt/notesSlides/notesSlide10.xml><?xml version="1.0" encoding="utf-8"?>
-<p:notes xmlns:a="http://schemas.openxmlformats.org/drawingml/2006/main" xmlns:r="http://schemas.openxmlformats.org/officeDocument/2006/relationships" xmlns:p="http://schemas.openxmlformats.org/presentationml/2006/main">
-  <p:cSld>
-    <p:spTree>
-      <p:nvGrpSpPr>
-        <p:cNvPr id="1" name=""/>
-        <p:cNvGrpSpPr/>
-        <p:nvPr/>
-      </p:nvGrpSpPr>
-      <p:grpSpPr>
-        <a:xfrm>
-          <a:off x="0" y="0"/>
-          <a:ext cx="0" cy="0"/>
-          <a:chOff x="0" y="0"/>
-          <a:chExt cx="0" cy="0"/>
-        </a:xfrm>
-      </p:grpSpPr>
-      <p:sp>
-        <p:nvSpPr>
-          <p:cNvPr id="2" name="Slide Image Placeholder 1"/>
-          <p:cNvSpPr>
-            <a:spLocks noGrp="1" noRot="1" noChangeAspect="1"/>
-          </p:cNvSpPr>
-          <p:nvPr>
-            <p:ph type="sldImg"/>
-          </p:nvPr>
-        </p:nvSpPr>
-        <p:spPr/>
-      </p:sp>
-      <p:sp>
-        <p:nvSpPr>
-          <p:cNvPr id="3" name="Notes Placeholder 2"/>
-          <p:cNvSpPr>
-            <a:spLocks noGrp="1"/>
-          </p:cNvSpPr>
-          <p:nvPr>
-            <p:ph type="body" idx="1"/>
-          </p:nvPr>
-        </p:nvSpPr>
-        <p:spPr/>
-        <p:txBody>
-          <a:bodyPr/>
-          <a:lstStyle/>
-          <a:p>
-            <a:r>
-              <a:rPr lang="en-US">
-                <a:ea typeface="Calibri"/>
-                <a:cs typeface="Calibri"/>
-              </a:rPr>
-              <a:t>*Leland*</a:t>
-            </a:r>
-            <a:endParaRPr lang="en-US"/>
-          </a:p>
-          <a:p>
-            <a:endParaRPr lang="en-US"/>
-          </a:p>
-          <a:p>
-            <a:r>
-              <a:rPr lang="en-US"/>
-              <a:t>Hi everyone, my name is Leland.</a:t>
-            </a:r>
-          </a:p>
-          <a:p>
-            <a:endParaRPr lang="en-US"/>
-          </a:p>
-          <a:p>
-            <a:r>
-              <a:rPr lang="en-US"/>
-              <a:t>My teammates - Johnny and Ishant - and I are going to present our project on how we plan to implement a Bayesian Network to model NFL Game Stats and Market Signals.</a:t>
-            </a:r>
-          </a:p>
-          <a:p>
-            <a:endParaRPr lang="en-US"/>
-          </a:p>
-          <a:p>
-            <a:r>
-              <a:rPr lang="en-US"/>
-              <a:t>I don’t think any of us are particularly interested in sports, but there are a few good reasons why we chose this project.</a:t>
-            </a:r>
-            <a:endParaRPr lang="en-US">
-              <a:ea typeface="Calibri"/>
-              <a:cs typeface="Calibri"/>
-            </a:endParaRPr>
-          </a:p>
-          <a:p>
-            <a:endParaRPr lang="en-US"/>
-          </a:p>
-          <a:p>
-            <a:r>
-              <a:rPr lang="en-US"/>
-              <a:t>The data is clean, public, and the causal direction is well known — both lend themselves well to a Bayesian Network.</a:t>
-            </a:r>
-            <a:endParaRPr lang="en-US">
-              <a:ea typeface="Calibri"/>
-              <a:cs typeface="+mn-lt"/>
-            </a:endParaRPr>
-          </a:p>
-          <a:p>
-            <a:endParaRPr lang="en-US"/>
-          </a:p>
-          <a:p>
-            <a:r>
-              <a:rPr lang="en-US"/>
-              <a:t>And as much as sports data has been modeled, we believe our project is a truly novel application of a Bayesian Network. </a:t>
-            </a:r>
-          </a:p>
-          <a:p>
-            <a:endParaRPr lang="en-US">
-              <a:ea typeface="Calibri"/>
-              <a:cs typeface="Calibri"/>
-            </a:endParaRPr>
-          </a:p>
-        </p:txBody>
-      </p:sp>
-      <p:sp>
-        <p:nvSpPr>
-          <p:cNvPr id="4" name="Slide Number Placeholder 3"/>
-          <p:cNvSpPr>
-            <a:spLocks noGrp="1"/>
-          </p:cNvSpPr>
-          <p:nvPr>
-            <p:ph type="sldNum" sz="quarter" idx="10"/>
-          </p:nvPr>
-        </p:nvSpPr>
-        <p:spPr/>
-        <p:txBody>
-          <a:bodyPr/>
-          <a:lstStyle/>
-          <a:p>
-            <a:fld id="{F7021451-1387-4CA6-816F-3879F97B5CBC}" type="slidenum">
-              <a:rPr lang="en-US"/>
-              <a:t>12</a:t>
-            </a:fld>
-            <a:endParaRPr lang="en-US"/>
-          </a:p>
-        </p:txBody>
-      </p:sp>
-    </p:spTree>
-    <p:extLst>
-      <p:ext uri="{BB962C8B-B14F-4D97-AF65-F5344CB8AC3E}">
-        <p14:creationId xmlns:p14="http://schemas.microsoft.com/office/powerpoint/2010/main" val="1024086991"/>
-      </p:ext>
-    </p:extLst>
-  </p:cSld>
-  <p:clrMapOvr>
-    <a:masterClrMapping/>
-  </p:clrMapOvr>
-</p:notes>
-</file>
-
-<file path=ppt/notesSlides/notesSlide2.xml><?xml version="1.0" encoding="utf-8"?>
 <p:notes xmlns:a="http://schemas.openxmlformats.org/drawingml/2006/main" xmlns:r="http://schemas.openxmlformats.org/officeDocument/2006/relationships" xmlns:p="http://schemas.openxmlformats.org/presentationml/2006/main">
   <p:cSld>
     <p:spTree>
@@ -619,56 +406,7 @@
           <a:bodyPr/>
           <a:lstStyle/>
           <a:p>
-            <a:r>
-              <a:rPr lang="en-US"/>
-              <a:t>Johnny</a:t>
-            </a:r>
-            <a:br>
-              <a:rPr lang="en-US"/>
-            </a:br>
-            <a:br>
-              <a:rPr lang="en-US"/>
-            </a:br>
-            <a:r>
-              <a:rPr lang="en-US"/>
-              <a:t>For the literature review, we grouped the existing work into three areas because each one connects to our project, but none of them fully answers our question.</a:t>
-            </a:r>
-          </a:p>
-          <a:p>
-            <a:r>
-              <a:rPr lang="en-US"/>
-              <a:t>The first area is Bayesian networks for sports prediction. This supports our choice of model because it shows that Bayesian networks can be useful for forecasting sports outcomes. The limitation is that these studies usually focus on game-related variables only, without including betting market movement.</a:t>
-            </a:r>
-          </a:p>
-          <a:p>
-            <a:endParaRPr lang="en-US"/>
-          </a:p>
-          <a:p>
-            <a:r>
-              <a:rPr lang="en-US"/>
-              <a:t>The second area combines game statistics with betting odds. These studies are closer to our idea, but they mostly blend the data sources for prediction. They do not directly test whether the market data and game stats contain independent information.</a:t>
-            </a:r>
-          </a:p>
-          <a:p>
-            <a:endParaRPr lang="en-US"/>
-          </a:p>
-          <a:p>
-            <a:r>
-              <a:rPr lang="en-US"/>
-              <a:t>The third area focuses on market efficiency and line movement. These papers look at whether opening and closing lines have predictive value, but they usually do not integrate detailed game statistics into one combined model.</a:t>
-            </a:r>
-          </a:p>
-          <a:p>
-            <a:endParaRPr lang="en-US"/>
-          </a:p>
-          <a:p>
-            <a:r>
-              <a:rPr lang="en-US"/>
-              <a:t>The key gap is shown at the bottom of the slide. A recent review confirmed that no study clearly combines all three pieces: Bayesian networks, game statistics, and market movement. That is where our project fits. We are not only trying to predict games. We are testing whether line movement adds information beyond the game fundamentals.</a:t>
-            </a:r>
-          </a:p>
-          <a:p>
-            <a:endParaRPr lang="en-US"/>
+            <a:endParaRPr lang="en-US" dirty="0"/>
           </a:p>
         </p:txBody>
       </p:sp>
@@ -695,7 +433,7 @@
           <a:p>
             <a:fld id="{F7021451-1387-4CA6-816F-3879F97B5CBC}" type="slidenum">
               <a:rPr lang="en-US"/>
-              <a:t>3</a:t>
+              <a:t>10</a:t>
             </a:fld>
             <a:endParaRPr lang="en-US"/>
           </a:p>
@@ -705,6 +443,284 @@
     <p:extLst>
       <p:ext uri="{BB962C8B-B14F-4D97-AF65-F5344CB8AC3E}">
         <p14:creationId xmlns:p14="http://schemas.microsoft.com/office/powerpoint/2010/main" val="3915406421"/>
+      </p:ext>
+    </p:extLst>
+  </p:cSld>
+  <p:clrMapOvr>
+    <a:masterClrMapping/>
+  </p:clrMapOvr>
+</p:notes>
+</file>
+
+<file path=ppt/notesSlides/notesSlide11.xml><?xml version="1.0" encoding="utf-8"?>
+<p:notes xmlns:a="http://schemas.openxmlformats.org/drawingml/2006/main" xmlns:r="http://schemas.openxmlformats.org/officeDocument/2006/relationships" xmlns:p="http://schemas.openxmlformats.org/presentationml/2006/main">
+  <p:cSld>
+    <p:spTree>
+      <p:nvGrpSpPr>
+        <p:cNvPr id="1" name="">
+          <a:extLst>
+            <a:ext uri="{FF2B5EF4-FFF2-40B4-BE49-F238E27FC236}">
+              <a16:creationId xmlns:a16="http://schemas.microsoft.com/office/drawing/2014/main" id="{53EE69EC-A9FB-A08F-E84B-F5CE9F81369A}"/>
+            </a:ext>
+          </a:extLst>
+        </p:cNvPr>
+        <p:cNvGrpSpPr/>
+        <p:nvPr/>
+      </p:nvGrpSpPr>
+      <p:grpSpPr>
+        <a:xfrm>
+          <a:off x="0" y="0"/>
+          <a:ext cx="0" cy="0"/>
+          <a:chOff x="0" y="0"/>
+          <a:chExt cx="0" cy="0"/>
+        </a:xfrm>
+      </p:grpSpPr>
+      <p:sp>
+        <p:nvSpPr>
+          <p:cNvPr id="2" name="Slide Image Placeholder 1">
+            <a:extLst>
+              <a:ext uri="{FF2B5EF4-FFF2-40B4-BE49-F238E27FC236}">
+                <a16:creationId xmlns:a16="http://schemas.microsoft.com/office/drawing/2014/main" id="{A5C8B015-FFD7-6F8E-0BB4-C73FE6C1329B}"/>
+              </a:ext>
+            </a:extLst>
+          </p:cNvPr>
+          <p:cNvSpPr>
+            <a:spLocks noGrp="1" noRot="1" noChangeAspect="1"/>
+          </p:cNvSpPr>
+          <p:nvPr>
+            <p:ph type="sldImg"/>
+          </p:nvPr>
+        </p:nvSpPr>
+        <p:spPr/>
+      </p:sp>
+      <p:sp>
+        <p:nvSpPr>
+          <p:cNvPr id="3" name="Notes Placeholder 2">
+            <a:extLst>
+              <a:ext uri="{FF2B5EF4-FFF2-40B4-BE49-F238E27FC236}">
+                <a16:creationId xmlns:a16="http://schemas.microsoft.com/office/drawing/2014/main" id="{83DD747D-6DA4-C7F2-A9A6-7F76909A3059}"/>
+              </a:ext>
+            </a:extLst>
+          </p:cNvPr>
+          <p:cNvSpPr>
+            <a:spLocks noGrp="1"/>
+          </p:cNvSpPr>
+          <p:nvPr>
+            <p:ph type="body" idx="1"/>
+          </p:nvPr>
+        </p:nvSpPr>
+        <p:spPr/>
+        <p:txBody>
+          <a:bodyPr/>
+          <a:lstStyle/>
+          <a:p>
+            <a:endParaRPr lang="en-US" dirty="0"/>
+          </a:p>
+        </p:txBody>
+      </p:sp>
+      <p:sp>
+        <p:nvSpPr>
+          <p:cNvPr id="4" name="Slide Number Placeholder 3">
+            <a:extLst>
+              <a:ext uri="{FF2B5EF4-FFF2-40B4-BE49-F238E27FC236}">
+                <a16:creationId xmlns:a16="http://schemas.microsoft.com/office/drawing/2014/main" id="{A47A043F-67D8-A50A-C9E0-4B016BD8F6D9}"/>
+              </a:ext>
+            </a:extLst>
+          </p:cNvPr>
+          <p:cNvSpPr>
+            <a:spLocks noGrp="1"/>
+          </p:cNvSpPr>
+          <p:nvPr>
+            <p:ph type="sldNum" sz="quarter" idx="10"/>
+          </p:nvPr>
+        </p:nvSpPr>
+        <p:spPr/>
+        <p:txBody>
+          <a:bodyPr/>
+          <a:lstStyle/>
+          <a:p>
+            <a:fld id="{F7021451-1387-4CA6-816F-3879F97B5CBC}" type="slidenum">
+              <a:rPr lang="en-US"/>
+              <a:t>11</a:t>
+            </a:fld>
+            <a:endParaRPr lang="en-US"/>
+          </a:p>
+        </p:txBody>
+      </p:sp>
+    </p:spTree>
+    <p:extLst>
+      <p:ext uri="{BB962C8B-B14F-4D97-AF65-F5344CB8AC3E}">
+        <p14:creationId xmlns:p14="http://schemas.microsoft.com/office/powerpoint/2010/main" val="3915406421"/>
+      </p:ext>
+    </p:extLst>
+  </p:cSld>
+  <p:clrMapOvr>
+    <a:masterClrMapping/>
+  </p:clrMapOvr>
+</p:notes>
+</file>
+
+<file path=ppt/notesSlides/notesSlide12.xml><?xml version="1.0" encoding="utf-8"?>
+<p:notes xmlns:a="http://schemas.openxmlformats.org/drawingml/2006/main" xmlns:r="http://schemas.openxmlformats.org/officeDocument/2006/relationships" xmlns:p="http://schemas.openxmlformats.org/presentationml/2006/main">
+  <p:cSld>
+    <p:spTree>
+      <p:nvGrpSpPr>
+        <p:cNvPr id="1" name=""/>
+        <p:cNvGrpSpPr/>
+        <p:nvPr/>
+      </p:nvGrpSpPr>
+      <p:grpSpPr>
+        <a:xfrm>
+          <a:off x="0" y="0"/>
+          <a:ext cx="0" cy="0"/>
+          <a:chOff x="0" y="0"/>
+          <a:chExt cx="0" cy="0"/>
+        </a:xfrm>
+      </p:grpSpPr>
+      <p:sp>
+        <p:nvSpPr>
+          <p:cNvPr id="2" name="Slide Image Placeholder 1"/>
+          <p:cNvSpPr>
+            <a:spLocks noGrp="1" noRot="1" noChangeAspect="1"/>
+          </p:cNvSpPr>
+          <p:nvPr>
+            <p:ph type="sldImg"/>
+          </p:nvPr>
+        </p:nvSpPr>
+        <p:spPr/>
+      </p:sp>
+      <p:sp>
+        <p:nvSpPr>
+          <p:cNvPr id="3" name="Notes Placeholder 2"/>
+          <p:cNvSpPr>
+            <a:spLocks noGrp="1"/>
+          </p:cNvSpPr>
+          <p:nvPr>
+            <p:ph type="body" idx="1"/>
+          </p:nvPr>
+        </p:nvSpPr>
+        <p:spPr/>
+        <p:txBody>
+          <a:bodyPr/>
+          <a:lstStyle/>
+          <a:p>
+            <a:endParaRPr lang="en-US" dirty="0">
+              <a:ea typeface="Calibri"/>
+              <a:cs typeface="Calibri"/>
+            </a:endParaRPr>
+          </a:p>
+        </p:txBody>
+      </p:sp>
+      <p:sp>
+        <p:nvSpPr>
+          <p:cNvPr id="4" name="Slide Number Placeholder 3"/>
+          <p:cNvSpPr>
+            <a:spLocks noGrp="1"/>
+          </p:cNvSpPr>
+          <p:nvPr>
+            <p:ph type="sldNum" sz="quarter" idx="10"/>
+          </p:nvPr>
+        </p:nvSpPr>
+        <p:spPr/>
+        <p:txBody>
+          <a:bodyPr/>
+          <a:lstStyle/>
+          <a:p>
+            <a:fld id="{F7021451-1387-4CA6-816F-3879F97B5CBC}" type="slidenum">
+              <a:rPr lang="en-US"/>
+              <a:t>12</a:t>
+            </a:fld>
+            <a:endParaRPr lang="en-US"/>
+          </a:p>
+        </p:txBody>
+      </p:sp>
+    </p:spTree>
+    <p:extLst>
+      <p:ext uri="{BB962C8B-B14F-4D97-AF65-F5344CB8AC3E}">
+        <p14:creationId xmlns:p14="http://schemas.microsoft.com/office/powerpoint/2010/main" val="1024086991"/>
+      </p:ext>
+    </p:extLst>
+  </p:cSld>
+  <p:clrMapOvr>
+    <a:masterClrMapping/>
+  </p:clrMapOvr>
+</p:notes>
+</file>
+
+<file path=ppt/notesSlides/notesSlide2.xml><?xml version="1.0" encoding="utf-8"?>
+<p:notes xmlns:a="http://schemas.openxmlformats.org/drawingml/2006/main" xmlns:r="http://schemas.openxmlformats.org/officeDocument/2006/relationships" xmlns:p="http://schemas.openxmlformats.org/presentationml/2006/main">
+  <p:cSld>
+    <p:spTree>
+      <p:nvGrpSpPr>
+        <p:cNvPr id="1" name=""/>
+        <p:cNvGrpSpPr/>
+        <p:nvPr/>
+      </p:nvGrpSpPr>
+      <p:grpSpPr>
+        <a:xfrm>
+          <a:off x="0" y="0"/>
+          <a:ext cx="0" cy="0"/>
+          <a:chOff x="0" y="0"/>
+          <a:chExt cx="0" cy="0"/>
+        </a:xfrm>
+      </p:grpSpPr>
+      <p:sp>
+        <p:nvSpPr>
+          <p:cNvPr id="2" name="Slide Image Placeholder 1"/>
+          <p:cNvSpPr>
+            <a:spLocks noGrp="1" noRot="1" noChangeAspect="1"/>
+          </p:cNvSpPr>
+          <p:nvPr>
+            <p:ph type="sldImg"/>
+          </p:nvPr>
+        </p:nvSpPr>
+        <p:spPr>
+          <a:xfrm>
+            <a:off x="-171450" y="1143000"/>
+            <a:ext cx="5486400" cy="3086100"/>
+          </a:xfrm>
+          <a:prstGeom prst="rect">
+            <a:avLst/>
+          </a:prstGeom>
+          <a:noFill/>
+          <a:ln w="12700">
+            <a:solidFill>
+              <a:prstClr val="black"/>
+            </a:solidFill>
+          </a:ln>
+        </p:spPr>
+      </p:sp>
+      <p:sp>
+        <p:nvSpPr>
+          <p:cNvPr id="3" name="Notes Placeholder 2"/>
+          <p:cNvSpPr>
+            <a:spLocks noGrp="1"/>
+          </p:cNvSpPr>
+          <p:nvPr>
+            <p:ph type="body" idx="1"/>
+          </p:nvPr>
+        </p:nvSpPr>
+        <p:spPr>
+          <a:xfrm>
+            <a:off x="514350" y="4400550"/>
+            <a:ext cx="4114800" cy="3600450"/>
+          </a:xfrm>
+          <a:prstGeom prst="rect">
+            <a:avLst/>
+          </a:prstGeom>
+        </p:spPr>
+        <p:txBody>
+          <a:bodyPr/>
+          <a:lstStyle/>
+          <a:p>
+            <a:endParaRPr lang="en-US" dirty="0"/>
+          </a:p>
+        </p:txBody>
+      </p:sp>
+    </p:spTree>
+    <p:extLst>
+      <p:ext uri="{BB962C8B-B14F-4D97-AF65-F5344CB8AC3E}">
+        <p14:creationId xmlns:p14="http://schemas.microsoft.com/office/powerpoint/2010/main" val="174143378"/>
       </p:ext>
     </p:extLst>
   </p:cSld>
@@ -776,56 +792,7 @@
           <a:bodyPr/>
           <a:lstStyle/>
           <a:p>
-            <a:r>
-              <a:rPr lang="en-US"/>
-              <a:t>Johnny</a:t>
-            </a:r>
-            <a:br>
-              <a:rPr lang="en-US"/>
-            </a:br>
-            <a:br>
-              <a:rPr lang="en-US"/>
-            </a:br>
-            <a:r>
-              <a:rPr lang="en-US"/>
-              <a:t>For the literature review, we grouped the existing work into three areas because each one connects to our project, but none of them fully answers our question.</a:t>
-            </a:r>
-          </a:p>
-          <a:p>
-            <a:r>
-              <a:rPr lang="en-US"/>
-              <a:t>The first area is Bayesian networks for sports prediction. This supports our choice of model because it shows that Bayesian networks can be useful for forecasting sports outcomes. The limitation is that these studies usually focus on game-related variables only, without including betting market movement.</a:t>
-            </a:r>
-          </a:p>
-          <a:p>
-            <a:endParaRPr lang="en-US"/>
-          </a:p>
-          <a:p>
-            <a:r>
-              <a:rPr lang="en-US"/>
-              <a:t>The second area combines game statistics with betting odds. These studies are closer to our idea, but they mostly blend the data sources for prediction. They do not directly test whether the market data and game stats contain independent information.</a:t>
-            </a:r>
-          </a:p>
-          <a:p>
-            <a:endParaRPr lang="en-US"/>
-          </a:p>
-          <a:p>
-            <a:r>
-              <a:rPr lang="en-US"/>
-              <a:t>The third area focuses on market efficiency and line movement. These papers look at whether opening and closing lines have predictive value, but they usually do not integrate detailed game statistics into one combined model.</a:t>
-            </a:r>
-          </a:p>
-          <a:p>
-            <a:endParaRPr lang="en-US"/>
-          </a:p>
-          <a:p>
-            <a:r>
-              <a:rPr lang="en-US"/>
-              <a:t>The key gap is shown at the bottom of the slide. A recent review confirmed that no study clearly combines all three pieces: Bayesian networks, game statistics, and market movement. That is where our project fits. We are not only trying to predict games. We are testing whether line movement adds information beyond the game fundamentals.</a:t>
-            </a:r>
-          </a:p>
-          <a:p>
-            <a:endParaRPr lang="en-US"/>
+            <a:endParaRPr lang="en-US" dirty="0"/>
           </a:p>
         </p:txBody>
       </p:sp>
@@ -852,7 +819,7 @@
           <a:p>
             <a:fld id="{F7021451-1387-4CA6-816F-3879F97B5CBC}" type="slidenum">
               <a:rPr lang="en-US"/>
-              <a:t>4</a:t>
+              <a:t>3</a:t>
             </a:fld>
             <a:endParaRPr lang="en-US"/>
           </a:p>
@@ -933,56 +900,7 @@
           <a:bodyPr/>
           <a:lstStyle/>
           <a:p>
-            <a:r>
-              <a:rPr lang="en-US"/>
-              <a:t>Johnny</a:t>
-            </a:r>
-            <a:br>
-              <a:rPr lang="en-US"/>
-            </a:br>
-            <a:br>
-              <a:rPr lang="en-US"/>
-            </a:br>
-            <a:r>
-              <a:rPr lang="en-US"/>
-              <a:t>For the literature review, we grouped the existing work into three areas because each one connects to our project, but none of them fully answers our question.</a:t>
-            </a:r>
-          </a:p>
-          <a:p>
-            <a:r>
-              <a:rPr lang="en-US"/>
-              <a:t>The first area is Bayesian networks for sports prediction. This supports our choice of model because it shows that Bayesian networks can be useful for forecasting sports outcomes. The limitation is that these studies usually focus on game-related variables only, without including betting market movement.</a:t>
-            </a:r>
-          </a:p>
-          <a:p>
-            <a:endParaRPr lang="en-US"/>
-          </a:p>
-          <a:p>
-            <a:r>
-              <a:rPr lang="en-US"/>
-              <a:t>The second area combines game statistics with betting odds. These studies are closer to our idea, but they mostly blend the data sources for prediction. They do not directly test whether the market data and game stats contain independent information.</a:t>
-            </a:r>
-          </a:p>
-          <a:p>
-            <a:endParaRPr lang="en-US"/>
-          </a:p>
-          <a:p>
-            <a:r>
-              <a:rPr lang="en-US"/>
-              <a:t>The third area focuses on market efficiency and line movement. These papers look at whether opening and closing lines have predictive value, but they usually do not integrate detailed game statistics into one combined model.</a:t>
-            </a:r>
-          </a:p>
-          <a:p>
-            <a:endParaRPr lang="en-US"/>
-          </a:p>
-          <a:p>
-            <a:r>
-              <a:rPr lang="en-US"/>
-              <a:t>The key gap is shown at the bottom of the slide. A recent review confirmed that no study clearly combines all three pieces: Bayesian networks, game statistics, and market movement. That is where our project fits. We are not only trying to predict games. We are testing whether line movement adds information beyond the game fundamentals.</a:t>
-            </a:r>
-          </a:p>
-          <a:p>
-            <a:endParaRPr lang="en-US"/>
+            <a:endParaRPr lang="en-US" dirty="0"/>
           </a:p>
         </p:txBody>
       </p:sp>
@@ -1009,7 +927,7 @@
           <a:p>
             <a:fld id="{F7021451-1387-4CA6-816F-3879F97B5CBC}" type="slidenum">
               <a:rPr lang="en-US"/>
-              <a:t>5</a:t>
+              <a:t>4</a:t>
             </a:fld>
             <a:endParaRPr lang="en-US"/>
           </a:p>
@@ -1090,56 +1008,7 @@
           <a:bodyPr/>
           <a:lstStyle/>
           <a:p>
-            <a:r>
-              <a:rPr lang="en-US"/>
-              <a:t>Johnny</a:t>
-            </a:r>
-            <a:br>
-              <a:rPr lang="en-US"/>
-            </a:br>
-            <a:br>
-              <a:rPr lang="en-US"/>
-            </a:br>
-            <a:r>
-              <a:rPr lang="en-US"/>
-              <a:t>For the literature review, we grouped the existing work into three areas because each one connects to our project, but none of them fully answers our question.</a:t>
-            </a:r>
-          </a:p>
-          <a:p>
-            <a:r>
-              <a:rPr lang="en-US"/>
-              <a:t>The first area is Bayesian networks for sports prediction. This supports our choice of model because it shows that Bayesian networks can be useful for forecasting sports outcomes. The limitation is that these studies usually focus on game-related variables only, without including betting market movement.</a:t>
-            </a:r>
-          </a:p>
-          <a:p>
-            <a:endParaRPr lang="en-US"/>
-          </a:p>
-          <a:p>
-            <a:r>
-              <a:rPr lang="en-US"/>
-              <a:t>The second area combines game statistics with betting odds. These studies are closer to our idea, but they mostly blend the data sources for prediction. They do not directly test whether the market data and game stats contain independent information.</a:t>
-            </a:r>
-          </a:p>
-          <a:p>
-            <a:endParaRPr lang="en-US"/>
-          </a:p>
-          <a:p>
-            <a:r>
-              <a:rPr lang="en-US"/>
-              <a:t>The third area focuses on market efficiency and line movement. These papers look at whether opening and closing lines have predictive value, but they usually do not integrate detailed game statistics into one combined model.</a:t>
-            </a:r>
-          </a:p>
-          <a:p>
-            <a:endParaRPr lang="en-US"/>
-          </a:p>
-          <a:p>
-            <a:r>
-              <a:rPr lang="en-US"/>
-              <a:t>The key gap is shown at the bottom of the slide. A recent review confirmed that no study clearly combines all three pieces: Bayesian networks, game statistics, and market movement. That is where our project fits. We are not only trying to predict games. We are testing whether line movement adds information beyond the game fundamentals.</a:t>
-            </a:r>
-          </a:p>
-          <a:p>
-            <a:endParaRPr lang="en-US"/>
+            <a:endParaRPr lang="en-US" dirty="0"/>
           </a:p>
         </p:txBody>
       </p:sp>
@@ -1166,7 +1035,7 @@
           <a:p>
             <a:fld id="{F7021451-1387-4CA6-816F-3879F97B5CBC}" type="slidenum">
               <a:rPr lang="en-US"/>
-              <a:t>7</a:t>
+              <a:t>5</a:t>
             </a:fld>
             <a:endParaRPr lang="en-US"/>
           </a:p>
@@ -1190,13 +1059,7 @@
   <p:cSld>
     <p:spTree>
       <p:nvGrpSpPr>
-        <p:cNvPr id="1" name="">
-          <a:extLst>
-            <a:ext uri="{FF2B5EF4-FFF2-40B4-BE49-F238E27FC236}">
-              <a16:creationId xmlns:a16="http://schemas.microsoft.com/office/drawing/2014/main" id="{53EE69EC-A9FB-A08F-E84B-F5CE9F81369A}"/>
-            </a:ext>
-          </a:extLst>
-        </p:cNvPr>
+        <p:cNvPr id="1" name=""/>
         <p:cNvGrpSpPr/>
         <p:nvPr/>
       </p:nvGrpSpPr>
@@ -1210,13 +1073,7 @@
       </p:grpSpPr>
       <p:sp>
         <p:nvSpPr>
-          <p:cNvPr id="2" name="Slide Image Placeholder 1">
-            <a:extLst>
-              <a:ext uri="{FF2B5EF4-FFF2-40B4-BE49-F238E27FC236}">
-                <a16:creationId xmlns:a16="http://schemas.microsoft.com/office/drawing/2014/main" id="{A5C8B015-FFD7-6F8E-0BB4-C73FE6C1329B}"/>
-              </a:ext>
-            </a:extLst>
-          </p:cNvPr>
+          <p:cNvPr id="2" name="Slide Image Placeholder 1"/>
           <p:cNvSpPr>
             <a:spLocks noGrp="1" noRot="1" noChangeAspect="1"/>
           </p:cNvSpPr>
@@ -1224,17 +1081,25 @@
             <p:ph type="sldImg"/>
           </p:nvPr>
         </p:nvSpPr>
-        <p:spPr/>
-      </p:sp>
-      <p:sp>
-        <p:nvSpPr>
-          <p:cNvPr id="3" name="Notes Placeholder 2">
-            <a:extLst>
-              <a:ext uri="{FF2B5EF4-FFF2-40B4-BE49-F238E27FC236}">
-                <a16:creationId xmlns:a16="http://schemas.microsoft.com/office/drawing/2014/main" id="{83DD747D-6DA4-C7F2-A9A6-7F76909A3059}"/>
-              </a:ext>
-            </a:extLst>
-          </p:cNvPr>
+        <p:spPr>
+          <a:xfrm>
+            <a:off x="-171450" y="1143000"/>
+            <a:ext cx="5486400" cy="3086100"/>
+          </a:xfrm>
+          <a:prstGeom prst="rect">
+            <a:avLst/>
+          </a:prstGeom>
+          <a:noFill/>
+          <a:ln w="12700">
+            <a:solidFill>
+              <a:prstClr val="black"/>
+            </a:solidFill>
+          </a:ln>
+        </p:spPr>
+      </p:sp>
+      <p:sp>
+        <p:nvSpPr>
+          <p:cNvPr id="3" name="Notes Placeholder 2"/>
           <p:cNvSpPr>
             <a:spLocks noGrp="1"/>
           </p:cNvSpPr>
@@ -1242,97 +1107,27 @@
             <p:ph type="body" idx="1"/>
           </p:nvPr>
         </p:nvSpPr>
-        <p:spPr/>
+        <p:spPr>
+          <a:xfrm>
+            <a:off x="514350" y="4400550"/>
+            <a:ext cx="4114800" cy="3600450"/>
+          </a:xfrm>
+          <a:prstGeom prst="rect">
+            <a:avLst/>
+          </a:prstGeom>
+        </p:spPr>
         <p:txBody>
           <a:bodyPr/>
           <a:lstStyle/>
           <a:p>
-            <a:r>
-              <a:rPr lang="en-US"/>
-              <a:t>Johnny</a:t>
-            </a:r>
-            <a:br>
-              <a:rPr lang="en-US"/>
-            </a:br>
-            <a:br>
-              <a:rPr lang="en-US"/>
-            </a:br>
-            <a:r>
-              <a:rPr lang="en-US"/>
-              <a:t>For the literature review, we grouped the existing work into three areas because each one connects to our project, but none of them fully answers our question.</a:t>
-            </a:r>
-          </a:p>
-          <a:p>
-            <a:r>
-              <a:rPr lang="en-US"/>
-              <a:t>The first area is Bayesian networks for sports prediction. This supports our choice of model because it shows that Bayesian networks can be useful for forecasting sports outcomes. The limitation is that these studies usually focus on game-related variables only, without including betting market movement.</a:t>
-            </a:r>
-          </a:p>
-          <a:p>
-            <a:endParaRPr lang="en-US"/>
-          </a:p>
-          <a:p>
-            <a:r>
-              <a:rPr lang="en-US"/>
-              <a:t>The second area combines game statistics with betting odds. These studies are closer to our idea, but they mostly blend the data sources for prediction. They do not directly test whether the market data and game stats contain independent information.</a:t>
-            </a:r>
-          </a:p>
-          <a:p>
-            <a:endParaRPr lang="en-US"/>
-          </a:p>
-          <a:p>
-            <a:r>
-              <a:rPr lang="en-US"/>
-              <a:t>The third area focuses on market efficiency and line movement. These papers look at whether opening and closing lines have predictive value, but they usually do not integrate detailed game statistics into one combined model.</a:t>
-            </a:r>
-          </a:p>
-          <a:p>
-            <a:endParaRPr lang="en-US"/>
-          </a:p>
-          <a:p>
-            <a:r>
-              <a:rPr lang="en-US"/>
-              <a:t>The key gap is shown at the bottom of the slide. A recent review confirmed that no study clearly combines all three pieces: Bayesian networks, game statistics, and market movement. That is where our project fits. We are not only trying to predict games. We are testing whether line movement adds information beyond the game fundamentals.</a:t>
-            </a:r>
-          </a:p>
-          <a:p>
-            <a:endParaRPr lang="en-US"/>
-          </a:p>
-        </p:txBody>
-      </p:sp>
-      <p:sp>
-        <p:nvSpPr>
-          <p:cNvPr id="4" name="Slide Number Placeholder 3">
-            <a:extLst>
-              <a:ext uri="{FF2B5EF4-FFF2-40B4-BE49-F238E27FC236}">
-                <a16:creationId xmlns:a16="http://schemas.microsoft.com/office/drawing/2014/main" id="{A47A043F-67D8-A50A-C9E0-4B016BD8F6D9}"/>
-              </a:ext>
-            </a:extLst>
-          </p:cNvPr>
-          <p:cNvSpPr>
-            <a:spLocks noGrp="1"/>
-          </p:cNvSpPr>
-          <p:nvPr>
-            <p:ph type="sldNum" sz="quarter" idx="10"/>
-          </p:nvPr>
-        </p:nvSpPr>
-        <p:spPr/>
-        <p:txBody>
-          <a:bodyPr/>
-          <a:lstStyle/>
-          <a:p>
-            <a:fld id="{F7021451-1387-4CA6-816F-3879F97B5CBC}" type="slidenum">
-              <a:rPr lang="en-US"/>
-              <a:t>8</a:t>
-            </a:fld>
-            <a:endParaRPr lang="en-US"/>
+            <a:endParaRPr lang="en-US" dirty="0"/>
           </a:p>
         </p:txBody>
       </p:sp>
     </p:spTree>
     <p:extLst>
       <p:ext uri="{BB962C8B-B14F-4D97-AF65-F5344CB8AC3E}">
-        <p14:creationId xmlns:p14="http://schemas.microsoft.com/office/powerpoint/2010/main" val="3915406421"/>
+        <p14:creationId xmlns:p14="http://schemas.microsoft.com/office/powerpoint/2010/main" val="3405044827"/>
       </p:ext>
     </p:extLst>
   </p:cSld>
@@ -1404,56 +1199,7 @@
           <a:bodyPr/>
           <a:lstStyle/>
           <a:p>
-            <a:r>
-              <a:rPr lang="en-US"/>
-              <a:t>Johnny</a:t>
-            </a:r>
-            <a:br>
-              <a:rPr lang="en-US"/>
-            </a:br>
-            <a:br>
-              <a:rPr lang="en-US"/>
-            </a:br>
-            <a:r>
-              <a:rPr lang="en-US"/>
-              <a:t>For the literature review, we grouped the existing work into three areas because each one connects to our project, but none of them fully answers our question.</a:t>
-            </a:r>
-          </a:p>
-          <a:p>
-            <a:r>
-              <a:rPr lang="en-US"/>
-              <a:t>The first area is Bayesian networks for sports prediction. This supports our choice of model because it shows that Bayesian networks can be useful for forecasting sports outcomes. The limitation is that these studies usually focus on game-related variables only, without including betting market movement.</a:t>
-            </a:r>
-          </a:p>
-          <a:p>
-            <a:endParaRPr lang="en-US"/>
-          </a:p>
-          <a:p>
-            <a:r>
-              <a:rPr lang="en-US"/>
-              <a:t>The second area combines game statistics with betting odds. These studies are closer to our idea, but they mostly blend the data sources for prediction. They do not directly test whether the market data and game stats contain independent information.</a:t>
-            </a:r>
-          </a:p>
-          <a:p>
-            <a:endParaRPr lang="en-US"/>
-          </a:p>
-          <a:p>
-            <a:r>
-              <a:rPr lang="en-US"/>
-              <a:t>The third area focuses on market efficiency and line movement. These papers look at whether opening and closing lines have predictive value, but they usually do not integrate detailed game statistics into one combined model.</a:t>
-            </a:r>
-          </a:p>
-          <a:p>
-            <a:endParaRPr lang="en-US"/>
-          </a:p>
-          <a:p>
-            <a:r>
-              <a:rPr lang="en-US"/>
-              <a:t>The key gap is shown at the bottom of the slide. A recent review confirmed that no study clearly combines all three pieces: Bayesian networks, game statistics, and market movement. That is where our project fits. We are not only trying to predict games. We are testing whether line movement adds information beyond the game fundamentals.</a:t>
-            </a:r>
-          </a:p>
-          <a:p>
-            <a:endParaRPr lang="en-US"/>
+            <a:endParaRPr lang="en-US" dirty="0"/>
           </a:p>
         </p:txBody>
       </p:sp>
@@ -1480,7 +1226,7 @@
           <a:p>
             <a:fld id="{F7021451-1387-4CA6-816F-3879F97B5CBC}" type="slidenum">
               <a:rPr lang="en-US"/>
-              <a:t>9</a:t>
+              <a:t>7</a:t>
             </a:fld>
             <a:endParaRPr lang="en-US"/>
           </a:p>
@@ -1561,56 +1307,7 @@
           <a:bodyPr/>
           <a:lstStyle/>
           <a:p>
-            <a:r>
-              <a:rPr lang="en-US"/>
-              <a:t>Johnny</a:t>
-            </a:r>
-            <a:br>
-              <a:rPr lang="en-US"/>
-            </a:br>
-            <a:br>
-              <a:rPr lang="en-US"/>
-            </a:br>
-            <a:r>
-              <a:rPr lang="en-US"/>
-              <a:t>For the literature review, we grouped the existing work into three areas because each one connects to our project, but none of them fully answers our question.</a:t>
-            </a:r>
-          </a:p>
-          <a:p>
-            <a:r>
-              <a:rPr lang="en-US"/>
-              <a:t>The first area is Bayesian networks for sports prediction. This supports our choice of model because it shows that Bayesian networks can be useful for forecasting sports outcomes. The limitation is that these studies usually focus on game-related variables only, without including betting market movement.</a:t>
-            </a:r>
-          </a:p>
-          <a:p>
-            <a:endParaRPr lang="en-US"/>
-          </a:p>
-          <a:p>
-            <a:r>
-              <a:rPr lang="en-US"/>
-              <a:t>The second area combines game statistics with betting odds. These studies are closer to our idea, but they mostly blend the data sources for prediction. They do not directly test whether the market data and game stats contain independent information.</a:t>
-            </a:r>
-          </a:p>
-          <a:p>
-            <a:endParaRPr lang="en-US"/>
-          </a:p>
-          <a:p>
-            <a:r>
-              <a:rPr lang="en-US"/>
-              <a:t>The third area focuses on market efficiency and line movement. These papers look at whether opening and closing lines have predictive value, but they usually do not integrate detailed game statistics into one combined model.</a:t>
-            </a:r>
-          </a:p>
-          <a:p>
-            <a:endParaRPr lang="en-US"/>
-          </a:p>
-          <a:p>
-            <a:r>
-              <a:rPr lang="en-US"/>
-              <a:t>The key gap is shown at the bottom of the slide. A recent review confirmed that no study clearly combines all three pieces: Bayesian networks, game statistics, and market movement. That is where our project fits. We are not only trying to predict games. We are testing whether line movement adds information beyond the game fundamentals.</a:t>
-            </a:r>
-          </a:p>
-          <a:p>
-            <a:endParaRPr lang="en-US"/>
+            <a:endParaRPr lang="en-US" dirty="0"/>
           </a:p>
         </p:txBody>
       </p:sp>
@@ -1637,7 +1334,7 @@
           <a:p>
             <a:fld id="{F7021451-1387-4CA6-816F-3879F97B5CBC}" type="slidenum">
               <a:rPr lang="en-US"/>
-              <a:t>10</a:t>
+              <a:t>8</a:t>
             </a:fld>
             <a:endParaRPr lang="en-US"/>
           </a:p>
@@ -1718,56 +1415,7 @@
           <a:bodyPr/>
           <a:lstStyle/>
           <a:p>
-            <a:r>
-              <a:rPr lang="en-US"/>
-              <a:t>Johnny</a:t>
-            </a:r>
-            <a:br>
-              <a:rPr lang="en-US"/>
-            </a:br>
-            <a:br>
-              <a:rPr lang="en-US"/>
-            </a:br>
-            <a:r>
-              <a:rPr lang="en-US"/>
-              <a:t>For the literature review, we grouped the existing work into three areas because each one connects to our project, but none of them fully answers our question.</a:t>
-            </a:r>
-          </a:p>
-          <a:p>
-            <a:r>
-              <a:rPr lang="en-US"/>
-              <a:t>The first area is Bayesian networks for sports prediction. This supports our choice of model because it shows that Bayesian networks can be useful for forecasting sports outcomes. The limitation is that these studies usually focus on game-related variables only, without including betting market movement.</a:t>
-            </a:r>
-          </a:p>
-          <a:p>
-            <a:endParaRPr lang="en-US"/>
-          </a:p>
-          <a:p>
-            <a:r>
-              <a:rPr lang="en-US"/>
-              <a:t>The second area combines game statistics with betting odds. These studies are closer to our idea, but they mostly blend the data sources for prediction. They do not directly test whether the market data and game stats contain independent information.</a:t>
-            </a:r>
-          </a:p>
-          <a:p>
-            <a:endParaRPr lang="en-US"/>
-          </a:p>
-          <a:p>
-            <a:r>
-              <a:rPr lang="en-US"/>
-              <a:t>The third area focuses on market efficiency and line movement. These papers look at whether opening and closing lines have predictive value, but they usually do not integrate detailed game statistics into one combined model.</a:t>
-            </a:r>
-          </a:p>
-          <a:p>
-            <a:endParaRPr lang="en-US"/>
-          </a:p>
-          <a:p>
-            <a:r>
-              <a:rPr lang="en-US"/>
-              <a:t>The key gap is shown at the bottom of the slide. A recent review confirmed that no study clearly combines all three pieces: Bayesian networks, game statistics, and market movement. That is where our project fits. We are not only trying to predict games. We are testing whether line movement adds information beyond the game fundamentals.</a:t>
-            </a:r>
-          </a:p>
-          <a:p>
-            <a:endParaRPr lang="en-US"/>
+            <a:endParaRPr lang="en-US" dirty="0"/>
           </a:p>
         </p:txBody>
       </p:sp>
@@ -1794,7 +1442,7 @@
           <a:p>
             <a:fld id="{F7021451-1387-4CA6-816F-3879F97B5CBC}" type="slidenum">
               <a:rPr lang="en-US"/>
-              <a:t>11</a:t>
+              <a:t>9</a:t>
             </a:fld>
             <a:endParaRPr lang="en-US"/>
           </a:p>
@@ -4654,7 +4302,7 @@
           <p:nvPr/>
         </p:nvPicPr>
         <p:blipFill>
-          <a:blip r:embed="rId2"/>
+          <a:blip r:embed="rId3"/>
           <a:stretch>
             <a:fillRect/>
           </a:stretch>
